--- a/templates/04-benchmarking-and-market-analysis-template.pptx
+++ b/templates/04-benchmarking-and-market-analysis-template.pptx
@@ -3558,7 +3558,7 @@
         <p:spPr>
           <a:xfrm>
             <a:off x="457200" y="1207008"/>
-            <a:ext cx="2743200" cy="182880"/>
+            <a:ext cx="11277295" cy="274320"/>
           </a:xfrm>
           <a:prstGeom prst="rect">
             <a:avLst/>
@@ -3574,13 +3574,13 @@
           <a:p>
             <a:pPr algn="l"/>
             <a:r>
-              <a:rPr lang="en-AU" sz="800" b="1" dirty="0">
+              <a:rPr lang="en-AU" sz="1250" b="1" dirty="0">
                 <a:solidFill>
-                  <a:srgbClr val="6B6A66"/>
+                  <a:srgbClr val="184F95"/>
                 </a:solidFill>
                 <a:latin typeface="Aptos"/>
               </a:rPr>
-              <a:t>HOW TO FILL IT IN</a:t>
+              <a:t>Benchmarking and Market Analysis — blank template</a:t>
             </a:r>
           </a:p>
         </p:txBody>
@@ -3593,8 +3593,8 @@
         </p:nvSpPr>
         <p:spPr>
           <a:xfrm>
-            <a:off x="457200" y="1408176"/>
-            <a:ext cx="2743200" cy="914400"/>
+            <a:off x="457200" y="6089904"/>
+            <a:ext cx="11277295" cy="347472"/>
           </a:xfrm>
           <a:prstGeom prst="rect">
             <a:avLst/>
@@ -3610,276 +3610,28 @@
           <a:p>
             <a:pPr algn="l"/>
             <a:r>
-              <a:rPr lang="en-AU" sz="950" dirty="0">
-                <a:solidFill>
-                  <a:srgbClr val="0B0B0B"/>
-                </a:solidFill>
-                <a:latin typeface="Aptos"/>
-              </a:rPr>
-              <a:t>One row per measure.</a:t>
-            </a:r>
-          </a:p>
-        </p:txBody>
-      </p:sp>
-      <p:sp>
-        <p:nvSpPr>
-          <p:cNvPr id="27" name="shape27"/>
-          <p:cNvSpPr/>
-          <p:nvPr/>
-        </p:nvSpPr>
-        <p:spPr>
-          <a:xfrm>
-            <a:off x="457200" y="2414016"/>
-            <a:ext cx="2743200" cy="182880"/>
-          </a:xfrm>
-          <a:prstGeom prst="rect">
-            <a:avLst/>
-          </a:prstGeom>
-          <a:noFill/>
-          <a:ln>
-            <a:noFill/>
-          </a:ln>
-        </p:spPr>
-        <p:txBody>
-          <a:bodyPr wrap="square" anchor="b" lIns="0" rIns="0" tIns="27432" bIns="27432"/>
-          <a:lstStyle/>
-          <a:p>
-            <a:pPr algn="l"/>
-            <a:r>
-              <a:rPr lang="en-AU" sz="800" b="1" dirty="0">
+              <a:rPr lang="en-AU" sz="850" dirty="0">
                 <a:solidFill>
                   <a:srgbClr val="6B6A66"/>
                 </a:solidFill>
                 <a:latin typeface="Aptos"/>
               </a:rPr>
-              <a:t>WHAT IT IS FOR</a:t>
-            </a:r>
-          </a:p>
-        </p:txBody>
-      </p:sp>
-      <p:sp>
-        <p:nvSpPr>
-          <p:cNvPr id="28" name="shape28"/>
-          <p:cNvSpPr/>
-          <p:nvPr/>
-        </p:nvSpPr>
-        <p:spPr>
-          <a:xfrm>
-            <a:off x="457200" y="2615184"/>
-            <a:ext cx="2743200" cy="731520"/>
-          </a:xfrm>
-          <a:prstGeom prst="rect">
-            <a:avLst/>
-          </a:prstGeom>
-          <a:noFill/>
-          <a:ln>
-            <a:noFill/>
-          </a:ln>
-        </p:spPr>
-        <p:txBody>
-          <a:bodyPr wrap="square" anchor="t" lIns="0" rIns="0" tIns="27432" bIns="27432"/>
-          <a:lstStyle/>
-          <a:p>
-            <a:pPr algn="l"/>
-            <a:r>
-              <a:rPr lang="en-AU" sz="950" dirty="0">
-                <a:solidFill>
-                  <a:srgbClr val="0B0B0B"/>
-                </a:solidFill>
-                <a:latin typeface="Aptos"/>
-              </a:rPr>
-              <a:t>Compares the practices and results of an enterprise against peers, competitors or a recognised standard, and reads the market it operates in.</a:t>
-            </a:r>
-          </a:p>
-        </p:txBody>
-      </p:sp>
-      <p:sp>
-        <p:nvSpPr>
-          <p:cNvPr id="29" name="shape29"/>
-          <p:cNvSpPr/>
-          <p:nvPr/>
-        </p:nvSpPr>
-        <p:spPr>
-          <a:xfrm>
-            <a:off x="457200" y="3438144"/>
-            <a:ext cx="2743200" cy="182880"/>
-          </a:xfrm>
-          <a:prstGeom prst="rect">
-            <a:avLst/>
-          </a:prstGeom>
-          <a:noFill/>
-          <a:ln>
-            <a:noFill/>
-          </a:ln>
-        </p:spPr>
-        <p:txBody>
-          <a:bodyPr wrap="square" anchor="b" lIns="0" rIns="0" tIns="27432" bIns="27432"/>
-          <a:lstStyle/>
-          <a:p>
-            <a:pPr algn="l"/>
-            <a:r>
-              <a:rPr lang="en-AU" sz="800" b="1" dirty="0">
-                <a:solidFill>
-                  <a:srgbClr val="6B6A66"/>
-                </a:solidFill>
-                <a:latin typeface="Aptos"/>
-              </a:rPr>
-              <a:t>MOST OFTEN CONFUSED WITH</a:t>
-            </a:r>
-          </a:p>
-        </p:txBody>
-      </p:sp>
-      <p:sp>
-        <p:nvSpPr>
-          <p:cNvPr id="30" name="shape30"/>
-          <p:cNvSpPr/>
-          <p:nvPr/>
-        </p:nvSpPr>
-        <p:spPr>
-          <a:xfrm>
-            <a:off x="457200" y="3639312"/>
-            <a:ext cx="2743200" cy="1737360"/>
-          </a:xfrm>
-          <a:prstGeom prst="rect">
-            <a:avLst/>
-          </a:prstGeom>
-          <a:solidFill>
-            <a:srgbClr val="F7F7F5"/>
-          </a:solidFill>
-          <a:ln>
-            <a:noFill/>
-          </a:ln>
-        </p:spPr>
-        <p:txBody>
-          <a:bodyPr wrap="square" anchor="t" lIns="91440" rIns="91440" tIns="27432" bIns="27432"/>
-          <a:lstStyle/>
-          <a:p>
-            <a:pPr algn="l"/>
-            <a:r>
-              <a:rPr lang="en-AU" sz="900" dirty="0">
-                <a:solidFill>
-                  <a:srgbClr val="0B0B0B"/>
-                </a:solidFill>
-                <a:latin typeface="Aptos"/>
-              </a:rPr>
-              <a:t>Benchmarking looks outward at others; measuring solution performance looks inward at your own. An item where the comparison target is another organisation is benchmarking, even if the words performance and measure appear in the stem.</a:t>
-            </a:r>
-          </a:p>
-        </p:txBody>
-      </p:sp>
-      <p:sp>
-        <p:nvSpPr>
-          <p:cNvPr id="31" name="shape31"/>
-          <p:cNvSpPr/>
-          <p:nvPr/>
-        </p:nvSpPr>
-        <p:spPr>
-          <a:xfrm>
-            <a:off x="457200" y="3639312"/>
-            <a:ext cx="32004" cy="1737360"/>
-          </a:xfrm>
-          <a:prstGeom prst="rect">
-            <a:avLst/>
-          </a:prstGeom>
-          <a:solidFill>
-            <a:srgbClr val="FAB219"/>
-          </a:solidFill>
-          <a:ln>
-            <a:noFill/>
-          </a:ln>
-        </p:spPr>
-        <p:txBody>
-          <a:bodyPr wrap="square" anchor="ctr" lIns="54864" rIns="54864" tIns="27432" bIns="27432"/>
-          <a:lstStyle/>
-          <a:p>
-            <a:pPr algn="l"/>
-            <a:endParaRPr lang="en-AU" sz="1100"/>
-          </a:p>
-        </p:txBody>
-      </p:sp>
-      <p:sp>
-        <p:nvSpPr>
-          <p:cNvPr id="32" name="shape32"/>
-          <p:cNvSpPr/>
-          <p:nvPr/>
-        </p:nvSpPr>
-        <p:spPr>
-          <a:xfrm>
-            <a:off x="457200" y="5486400"/>
-            <a:ext cx="2743200" cy="502920"/>
-          </a:xfrm>
-          <a:prstGeom prst="rect">
-            <a:avLst/>
-          </a:prstGeom>
-          <a:noFill/>
-          <a:ln>
-            <a:noFill/>
-          </a:ln>
-        </p:spPr>
-        <p:txBody>
-          <a:bodyPr wrap="square" anchor="t" lIns="0" rIns="0" tIns="27432" bIns="27432"/>
-          <a:lstStyle/>
-          <a:p>
-            <a:pPr algn="l"/>
-            <a:r>
-              <a:rPr lang="en-AU" sz="800" dirty="0">
-                <a:solidFill>
-                  <a:srgbClr val="6B6A66"/>
-                </a:solidFill>
-                <a:latin typeface="Aptos"/>
-              </a:rPr>
-              <a:t>Tasks: 6.1 Analyze Current State · 6.2 Define Future State · 8.4 Assess Enterprise Limitations</a:t>
-            </a:r>
-          </a:p>
-        </p:txBody>
-      </p:sp>
-      <p:sp>
-        <p:nvSpPr>
-          <p:cNvPr id="33" name="shape33"/>
-          <p:cNvSpPr/>
-          <p:nvPr/>
-        </p:nvSpPr>
-        <p:spPr>
-          <a:xfrm>
-            <a:off x="3520440" y="1188720"/>
-            <a:ext cx="8214055" cy="237744"/>
-          </a:xfrm>
-          <a:prstGeom prst="rect">
-            <a:avLst/>
-          </a:prstGeom>
-          <a:noFill/>
-          <a:ln>
-            <a:noFill/>
-          </a:ln>
-        </p:spPr>
-        <p:txBody>
-          <a:bodyPr wrap="square" anchor="b" lIns="0" rIns="0" tIns="27432" bIns="27432"/>
-          <a:lstStyle/>
-          <a:p>
-            <a:pPr algn="l"/>
-            <a:r>
-              <a:rPr lang="en-AU" sz="1050" b="1" dirty="0">
-                <a:solidFill>
-                  <a:srgbClr val="184F95"/>
-                </a:solidFill>
-                <a:latin typeface="Aptos"/>
-              </a:rPr>
-              <a:t>Benchmarking and Market Analysis — blank template</a:t>
+              <a:t>One row per measure.</a:t>
             </a:r>
           </a:p>
         </p:txBody>
       </p:sp>
       <p:graphicFrame>
         <p:nvGraphicFramePr>
-          <p:cNvPr id="34" name="table34"/>
+          <p:cNvPr id="27" name="table27"/>
           <p:cNvGraphicFramePr>
             <a:graphicFrameLocks noGrp="1"/>
           </p:cNvGraphicFramePr>
           <p:nvPr/>
         </p:nvGraphicFramePr>
         <p:xfrm>
-          <a:off x="3520440" y="1499616"/>
-          <a:ext cx="8214055" cy="3840480"/>
+          <a:off x="457200" y="1700784"/>
+          <a:ext cx="11277295" cy="3840480"/>
         </p:xfrm>
         <a:graphic>
           <a:graphicData uri="http://schemas.openxmlformats.org/drawingml/2006/table">
@@ -3887,9 +3639,9 @@
               <a:tblPr firstRow="1" bandRow="1"/>
               <a:tblGrid>
                 <a:gridCol w="2377440"/>
-                <a:gridCol w="1945538"/>
-                <a:gridCol w="1945538"/>
-                <a:gridCol w="1945538"/>
+                <a:gridCol w="2966618"/>
+                <a:gridCol w="2966618"/>
+                <a:gridCol w="2966618"/>
               </a:tblGrid>
               <a:tr h="384048">
                 <a:tc>
